--- a/teaching-pack/13-M09-false-precision/M09-student.pptx
+++ b/teaching-pack/13-M09-false-precision/M09-student.pptx
@@ -6836,7 +6836,7 @@
                 </a:solidFill>
                 <a:latin typeface="Arial"/>
               </a:rPr>
-              <a:t>Do not replace one unsupported exact number with a formal interval; that method begins in M10.</a:t>
+              <a:t>Do not replace one unsupported exact number with a method the class has not learned yet.</a:t>
             </a:r>
           </a:p>
         </p:txBody>
@@ -9498,7 +9498,7 @@
                 </a:solidFill>
                 <a:latin typeface="Arial"/>
               </a:rPr>
-              <a:t>No formal interval or significance test is required today.</a:t>
+              <a:t>Use only today's precision, spread, and sampling evidence.</a:t>
             </a:r>
           </a:p>
         </p:txBody>

--- a/teaching-pack/13-M09-false-precision/M09-student.pptx
+++ b/teaching-pack/13-M09-false-precision/M09-student.pptx
@@ -518,13 +518,19 @@
           <a:lstStyle/>
           <a:p>
             <a:r>
-              <a:t>OLI CANON SAY — revised M09 Cloud hard-review pass.</a:t>
+              <a:t>M09 SAY STATUS: HOLD — CLOUD RE-CHECK PASS REQUIRED.</a:t>
             </a:r>
           </a:p>
           <a:p/>
           <a:p>
             <a:r>
-              <a:t>TITLE — SAY: “To the single cycle.” Introduce M09 as a hunt for precision that outruns its statistical basis. Do not preview the M10 toolkit.</a:t>
+              <a:t>PLACEHOLDER ONLY. Do not treat as canon dialogue.</a:t>
+            </a:r>
+          </a:p>
+          <a:p/>
+          <a:p>
+            <a:r>
+              <a:t>TITLE HOOK — Introduce M09 and the false-precision investigation. Do not preview any later statistical method.</a:t>
             </a:r>
           </a:p>
         </p:txBody>
@@ -594,13 +600,19 @@
           <a:lstStyle/>
           <a:p>
             <a:r>
-              <a:t>OLI CANON SAY — revised M09 Cloud hard-review pass.</a:t>
+              <a:t>M09 SAY STATUS: HOLD — CLOUD RE-CHECK PASS REQUIRED.</a:t>
             </a:r>
           </a:p>
           <a:p/>
           <a:p>
             <a:r>
-              <a:t>SAMPLING TRANSITION — Move from FOREMAN’s single estimate to repeated samples from one fixed instructional population.</a:t>
+              <a:t>PLACEHOLDER ONLY. Do not treat as canon dialogue.</a:t>
+            </a:r>
+          </a:p>
+          <a:p/>
+          <a:p>
+            <a:r>
+              <a:t>SAMPLING TRANSITION HOOK — Move from one estimate to what changes across repeated samples.</a:t>
             </a:r>
           </a:p>
         </p:txBody>
@@ -670,13 +682,19 @@
           <a:lstStyle/>
           <a:p>
             <a:r>
-              <a:t>OLI CANON SAY — revised M09 Cloud hard-review pass.</a:t>
+              <a:t>M09 SAY STATUS: HOLD — CLOUD RE-CHECK PASS REQUIRED.</a:t>
             </a:r>
           </a:p>
           <a:p/>
           <a:p>
             <a:r>
-              <a:t>TEACH — Random sampling is defined by the chance-selection process and sampling frame, not by what the analyst calls the sample afterward.</a:t>
+              <a:t>PLACEHOLDER ONLY. Do not treat as canon dialogue.</a:t>
+            </a:r>
+          </a:p>
+          <a:p/>
+          <a:p>
+            <a:r>
+              <a:t>TEACH HOOK — Define random sampling by selection process and sampling frame.</a:t>
             </a:r>
           </a:p>
         </p:txBody>
@@ -746,13 +764,19 @@
           <a:lstStyle/>
           <a:p>
             <a:r>
-              <a:t>OLI CANON SAY — revised M09 Cloud hard-review pass.</a:t>
+              <a:t>M09 SAY STATUS: HOLD — CLOUD RE-CHECK PASS REQUIRED.</a:t>
             </a:r>
           </a:p>
           <a:p/>
           <a:p>
             <a:r>
-              <a:t>TEACH — Introduce sampling variability: each random sample of eight is one realization, so class means should differ.</a:t>
+              <a:t>PLACEHOLDER ONLY. Do not treat as canon dialogue.</a:t>
+            </a:r>
+          </a:p>
+          <a:p/>
+          <a:p>
+            <a:r>
+              <a:t>TEACH HOOK — Define sampling variability before students see the class means.</a:t>
             </a:r>
           </a:p>
         </p:txBody>
@@ -822,13 +846,19 @@
           <a:lstStyle/>
           <a:p>
             <a:r>
-              <a:t>OLI CANON SAY — revised M09 Cloud hard-review pass.</a:t>
+              <a:t>M09 SAY STATUS: HOLD — CLOUD RE-CHECK PASS REQUIRED.</a:t>
             </a:r>
           </a:p>
           <a:p/>
           <a:p>
             <a:r>
-              <a:t>LAB A — Students inspect the small fatigue dataset, reproduce the estimate, calculate visible scatter, and mark where the single-cycle precision outruns the evidence.</a:t>
+              <a:t>PLACEHOLDER ONLY. Do not treat as canon dialogue.</a:t>
+            </a:r>
+          </a:p>
+          <a:p/>
+          <a:p>
+            <a:r>
+              <a:t>LAB A HOOK — Students reproduce the point estimate, inspect resolution and spread, and mark unsupported digits.</a:t>
             </a:r>
           </a:p>
         </p:txBody>
@@ -898,13 +928,19 @@
           <a:lstStyle/>
           <a:p>
             <a:r>
-              <a:t>OLI CANON SAY — revised M09 Cloud hard-review pass.</a:t>
+              <a:t>M09 SAY STATUS: HOLD — CLOUD RE-CHECK PASS REQUIRED.</a:t>
             </a:r>
           </a:p>
           <a:p/>
           <a:p>
             <a:r>
-              <a:t>LAB B — Students work in pairs with assigned random samples of eight from the 200-value spreadsheet, calculate means, and put the means on the board. Repeat that this file is a demonstrator, not Otter Bend evidence.</a:t>
+              <a:t>PLACEHOLDER ONLY. Do not treat as canon dialogue.</a:t>
+            </a:r>
+          </a:p>
+          <a:p/>
+          <a:p>
+            <a:r>
+              <a:t>LAB B HOOK — Release the 200-row demonstrator and assigned random draws. Repeat that it is not bridge evidence.</a:t>
             </a:r>
           </a:p>
         </p:txBody>
@@ -974,13 +1010,19 @@
           <a:lstStyle/>
           <a:p>
             <a:r>
-              <a:t>OLI CANON SAY — revised M09 Cloud hard-review pass.</a:t>
+              <a:t>M09 SAY STATUS: HOLD — CLOUD RE-CHECK PASS REQUIRED.</a:t>
             </a:r>
           </a:p>
           <a:p/>
           <a:p>
             <a:r>
-              <a:t>LAB C — Students inspect the real Otter Bend core locations. Every core was drilled from the shoulder where access was easy. Diane stays BELIEVER through the hunt; Wes stays drafting and distracted.</a:t>
+              <a:t>PLACEHOLDER ONLY. Do not treat as canon dialogue.</a:t>
+            </a:r>
+          </a:p>
+          <a:p/>
+          <a:p>
+            <a:r>
+              <a:t>LAB C HOOK — Return to the actual shoulder-only cores and audit the convenience sampling frame. Diane stays BELIEVER.</a:t>
             </a:r>
           </a:p>
         </p:txBody>
@@ -1050,13 +1092,19 @@
           <a:lstStyle/>
           <a:p>
             <a:r>
-              <a:t>OLI CANON SAY — revised M09 Cloud hard-review pass.</a:t>
+              <a:t>M09 SAY STATUS: HOLD — CLOUD RE-CHECK PASS REQUIRED.</a:t>
             </a:r>
           </a:p>
           <a:p/>
           <a:p>
             <a:r>
-              <a:t>NOTE — Students finalize Note version 2 only: claim, check, result. No new homework number is assigned.</a:t>
+              <a:t>PLACEHOLDER ONLY. Do not treat as canon dialogue.</a:t>
+            </a:r>
+          </a:p>
+          <a:p/>
+          <a:p>
+            <a:r>
+              <a:t>NOTE HOOK — Students commit claim/check/result before reveal; assign no new homework number.</a:t>
             </a:r>
           </a:p>
         </p:txBody>
@@ -1126,13 +1174,19 @@
           <a:lstStyle/>
           <a:p>
             <a:r>
-              <a:t>OLI CANON SAY — revised M09 Cloud hard-review pass.</a:t>
+              <a:t>M09 SAY STATUS: HOLD — CLOUD RE-CHECK PASS REQUIRED.</a:t>
             </a:r>
           </a:p>
           <a:p/>
           <a:p>
             <a:r>
-              <a:t>CLOSE — Collect Note version 2. Diane still wants one number. Light hook only: someone will ask whether the deck got worse since the earlier readings. Do not name confidence intervals, p-values, or any other M10 method.</a:t>
+              <a:t>PLACEHOLDER ONLY. Do not treat as canon dialogue.</a:t>
+            </a:r>
+          </a:p>
+          <a:p/>
+          <a:p>
+            <a:r>
+              <a:t>CLOSE HOOK — Insert only the Cloud re-check PASS close. Do not preview or name the next meeting's statistical methods.</a:t>
             </a:r>
           </a:p>
         </p:txBody>
@@ -1202,13 +1256,19 @@
           <a:lstStyle/>
           <a:p>
             <a:r>
-              <a:t>OLI CANON SAY — revised M09 Cloud hard-review pass.</a:t>
+              <a:t>M09 SAY STATUS: HOLD — CLOUD RE-CHECK PASS REQUIRED.</a:t>
             </a:r>
           </a:p>
           <a:p/>
           <a:p>
             <a:r>
-              <a:t>INBOX — The simulation clock moves forward from M08. FOREMAN sends an automated Otter Bend sheave-shaft alert: 41,872,316 cycles remaining. Diane Halvorsen, PE stays in BELIEVER mode: “Just give me one number.” Wes Tanaka, EIT flags that the precision implies certainty the fatigue-test scatter does not support.</a:t>
+              <a:t>PLACEHOLDER ONLY. Do not treat as canon dialogue.</a:t>
+            </a:r>
+          </a:p>
+          <a:p/>
+          <a:p>
+            <a:r>
+              <a:t>INBOX HOOK — Paste only Cloud re-check PASS dialogue here. Preserve the locked beat: Diane Halvorsen, PE wants one number; FOREMAN reports 41,872,316 cycles; Diane is in BELIEVER mode. Verify the revised Wes Tanaka, EIT line before folding.</a:t>
             </a:r>
           </a:p>
         </p:txBody>
@@ -1278,13 +1338,19 @@
           <a:lstStyle/>
           <a:p>
             <a:r>
-              <a:t>OLI CANON SAY — revised M09 Cloud hard-review pass.</a:t>
+              <a:t>M09 SAY STATUS: HOLD — CLOUD RE-CHECK PASS REQUIRED.</a:t>
             </a:r>
           </a:p>
           <a:p/>
           <a:p>
             <a:r>
-              <a:t>HUNT — The class receives the FOREMAN point estimate, the small fatigue-test dataset, and the 200-value sampling demonstrator. Trace the estimate, inspect scatter, compare random samples of eight, then audit the actual shoulder-only cores.</a:t>
+              <a:t>PLACEHOLDER ONLY. Do not treat as canon dialogue.</a:t>
+            </a:r>
+          </a:p>
+          <a:p/>
+          <a:p>
+            <a:r>
+              <a:t>HUNT HOOK — Frame trace, compare, sample, and report without revealing the supported reporting form. Diane remains BELIEVER throughout the hunt.</a:t>
             </a:r>
           </a:p>
         </p:txBody>
@@ -1354,13 +1420,19 @@
           <a:lstStyle/>
           <a:p>
             <a:r>
-              <a:t>OLI CANON SAY — revised M09 Cloud hard-review pass.</a:t>
+              <a:t>M09 SAY STATUS: HOLD — CLOUD RE-CHECK PASS REQUIRED.</a:t>
             </a:r>
           </a:p>
           <a:p/>
           <a:p>
             <a:r>
-              <a:t>TEACH TRANSITION — Lead the approved discussion on the statistical basis for claims. Precision without accuracy or range is misleading.</a:t>
+              <a:t>PLACEHOLDER ONLY. Do not treat as canon dialogue.</a:t>
+            </a:r>
+          </a:p>
+          <a:p/>
+          <a:p>
+            <a:r>
+              <a:t>TEACH TRANSITION HOOK — Move from the exact-looking output to the statistical basis for a quantitative claim.</a:t>
             </a:r>
           </a:p>
         </p:txBody>
@@ -1430,13 +1502,19 @@
           <a:lstStyle/>
           <a:p>
             <a:r>
-              <a:t>OLI CANON SAY — revised M09 Cloud hard-review pass.</a:t>
+              <a:t>M09 SAY STATUS: HOLD — CLOUD RE-CHECK PASS REQUIRED.</a:t>
             </a:r>
           </a:p>
           <a:p/>
           <a:p>
             <a:r>
-              <a:t>TEACH — FOREMAN’s designed error is overconfidence: one exact-looking point estimate, no uncertainty bounds, and certainty that the noisy inputs cannot support.</a:t>
+              <a:t>PLACEHOLDER ONLY. Do not treat as canon dialogue.</a:t>
+            </a:r>
+          </a:p>
+          <a:p/>
+          <a:p>
+            <a:r>
+              <a:t>TEACH HOOK — Define AI overconfidence through formatting, tone, and omitted uncertainty.</a:t>
             </a:r>
           </a:p>
         </p:txBody>
@@ -1506,13 +1584,19 @@
           <a:lstStyle/>
           <a:p>
             <a:r>
-              <a:t>OLI CANON SAY — revised M09 Cloud hard-review pass.</a:t>
+              <a:t>M09 SAY STATUS: HOLD — CLOUD RE-CHECK PASS REQUIRED.</a:t>
             </a:r>
           </a:p>
           <a:p/>
           <a:p>
             <a:r>
-              <a:t>TEACH — Reproduce the calculation, then separate correct arithmetic from a defensible reporting scale. The single-cycle display is the error target.</a:t>
+              <a:t>PLACEHOLDER ONLY. Do not treat as canon dialogue.</a:t>
+            </a:r>
+          </a:p>
+          <a:p/>
+          <a:p>
+            <a:r>
+              <a:t>TEACH HOOK — Separate reproducible arithmetic from evidence-supported precision.</a:t>
             </a:r>
           </a:p>
         </p:txBody>
@@ -1582,13 +1666,19 @@
           <a:lstStyle/>
           <a:p>
             <a:r>
-              <a:t>OLI CANON SAY — revised M09 Cloud hard-review pass.</a:t>
+              <a:t>M09 SAY STATUS: HOLD — CLOUD RE-CHECK PASS REQUIRED.</a:t>
             </a:r>
           </a:p>
           <a:p/>
           <a:p>
             <a:r>
-              <a:t>TEACH — The fatigue evidence supports only two or three significant figures. Significant figures preserve evidence-supported scale; they do not create accuracy.</a:t>
+              <a:t>PLACEHOLDER ONLY. Do not treat as canon dialogue.</a:t>
+            </a:r>
+          </a:p>
+          <a:p/>
+          <a:p>
+            <a:r>
+              <a:t>TEACH HOOK — Treat significant figures as evidence-based reporting, not a decimal-counting ritual.</a:t>
             </a:r>
           </a:p>
         </p:txBody>
@@ -1658,13 +1748,19 @@
           <a:lstStyle/>
           <a:p>
             <a:r>
-              <a:t>OLI CANON SAY — revised M09 Cloud hard-review pass.</a:t>
+              <a:t>M09 SAY STATUS: HOLD — CLOUD RE-CHECK PASS REQUIRED.</a:t>
             </a:r>
           </a:p>
           <a:p/>
           <a:p>
             <a:r>
-              <a:t>TEACH — Ask what data, sampling process, variability, and assumptions form the statistical basis for the claim.</a:t>
+              <a:t>PLACEHOLDER ONLY. Do not treat as canon dialogue.</a:t>
+            </a:r>
+          </a:p>
+          <a:p/>
+          <a:p>
+            <a:r>
+              <a:t>TEACH HOOK — Ask for the data, variability, and method behind a quantitative claim.</a:t>
             </a:r>
           </a:p>
         </p:txBody>
@@ -1734,13 +1830,19 @@
           <a:lstStyle/>
           <a:p>
             <a:r>
-              <a:t>OLI CANON SAY — revised M09 Cloud hard-review pass.</a:t>
+              <a:t>M09 SAY STATUS: HOLD — CLOUD RE-CHECK PASS REQUIRED.</a:t>
             </a:r>
           </a:p>
           <a:p/>
           <a:p>
             <a:r>
-              <a:t>TEACH — SAY: “A single number can be useful only if its limits stay visible.” Diane remains BELIEVER and still wants one number.</a:t>
+              <a:t>PLACEHOLDER ONLY. Do not treat as canon dialogue.</a:t>
+            </a:r>
+          </a:p>
+          <a:p/>
+          <a:p>
+            <a:r>
+              <a:t>TEACH HOOK — Contrast calculator output with defensible reporting scale without adding character dialogue.</a:t>
             </a:r>
           </a:p>
         </p:txBody>

--- a/teaching-pack/13-M09-false-precision/M09-student.pptx
+++ b/teaching-pack/13-M09-false-precision/M09-student.pptx
@@ -518,19 +518,13 @@
           <a:lstStyle/>
           <a:p>
             <a:r>
-              <a:t>M09 SAY STATUS: HOLD — CLOUD RE-CHECK PASS REQUIRED.</a:t>
+              <a:t>OLI CANON SAY — revised M09 Cloud re-check PASS.</a:t>
             </a:r>
           </a:p>
           <a:p/>
           <a:p>
             <a:r>
-              <a:t>PLACEHOLDER ONLY. Do not treat as canon dialogue.</a:t>
-            </a:r>
-          </a:p>
-          <a:p/>
-          <a:p>
-            <a:r>
-              <a:t>TITLE HOOK — Introduce M09 and the false-precision investigation. Do not preview any later statistical method.</a:t>
+              <a:t>TITLE — SAY: “To the single cycle.” Introduce M09 as a hunt for precision that outruns its statistical basis. Do not preview a later statistical method.</a:t>
             </a:r>
           </a:p>
         </p:txBody>
@@ -600,19 +594,13 @@
           <a:lstStyle/>
           <a:p>
             <a:r>
-              <a:t>M09 SAY STATUS: HOLD — CLOUD RE-CHECK PASS REQUIRED.</a:t>
+              <a:t>OLI CANON SAY — revised M09 Cloud re-check PASS.</a:t>
             </a:r>
           </a:p>
           <a:p/>
           <a:p>
             <a:r>
-              <a:t>PLACEHOLDER ONLY. Do not treat as canon dialogue.</a:t>
-            </a:r>
-          </a:p>
-          <a:p/>
-          <a:p>
-            <a:r>
-              <a:t>SAMPLING TRANSITION HOOK — Move from one estimate to what changes across repeated samples.</a:t>
+              <a:t>SAMPLING TRANSITION — Move from FOREMAN’s single estimate to repeated samples from one fixed instructional population.</a:t>
             </a:r>
           </a:p>
         </p:txBody>
@@ -682,19 +670,13 @@
           <a:lstStyle/>
           <a:p>
             <a:r>
-              <a:t>M09 SAY STATUS: HOLD — CLOUD RE-CHECK PASS REQUIRED.</a:t>
+              <a:t>OLI CANON SAY — revised M09 Cloud re-check PASS.</a:t>
             </a:r>
           </a:p>
           <a:p/>
           <a:p>
             <a:r>
-              <a:t>PLACEHOLDER ONLY. Do not treat as canon dialogue.</a:t>
-            </a:r>
-          </a:p>
-          <a:p/>
-          <a:p>
-            <a:r>
-              <a:t>TEACH HOOK — Define random sampling by selection process and sampling frame.</a:t>
+              <a:t>TEACH — Random sampling is defined by the chance-selection process and sampling frame, not by what the analyst calls the sample afterward.</a:t>
             </a:r>
           </a:p>
         </p:txBody>
@@ -764,19 +746,13 @@
           <a:lstStyle/>
           <a:p>
             <a:r>
-              <a:t>M09 SAY STATUS: HOLD — CLOUD RE-CHECK PASS REQUIRED.</a:t>
+              <a:t>OLI CANON SAY — revised M09 Cloud re-check PASS.</a:t>
             </a:r>
           </a:p>
           <a:p/>
           <a:p>
             <a:r>
-              <a:t>PLACEHOLDER ONLY. Do not treat as canon dialogue.</a:t>
-            </a:r>
-          </a:p>
-          <a:p/>
-          <a:p>
-            <a:r>
-              <a:t>TEACH HOOK — Define sampling variability before students see the class means.</a:t>
+              <a:t>TEACH — Introduce sampling variability: each random sample of eight is one realization, so class means should differ.</a:t>
             </a:r>
           </a:p>
         </p:txBody>
@@ -846,19 +822,13 @@
           <a:lstStyle/>
           <a:p>
             <a:r>
-              <a:t>M09 SAY STATUS: HOLD — CLOUD RE-CHECK PASS REQUIRED.</a:t>
+              <a:t>OLI CANON SAY — revised M09 Cloud re-check PASS.</a:t>
             </a:r>
           </a:p>
           <a:p/>
           <a:p>
             <a:r>
-              <a:t>PLACEHOLDER ONLY. Do not treat as canon dialogue.</a:t>
-            </a:r>
-          </a:p>
-          <a:p/>
-          <a:p>
-            <a:r>
-              <a:t>LAB A HOOK — Students reproduce the point estimate, inspect resolution and spread, and mark unsupported digits.</a:t>
+              <a:t>LAB A — Students inspect the small fatigue dataset, reproduce the estimate, calculate visible scatter, and mark where the single-cycle precision outruns the evidence.</a:t>
             </a:r>
           </a:p>
         </p:txBody>
@@ -928,19 +898,13 @@
           <a:lstStyle/>
           <a:p>
             <a:r>
-              <a:t>M09 SAY STATUS: HOLD — CLOUD RE-CHECK PASS REQUIRED.</a:t>
+              <a:t>OLI CANON SAY — revised M09 Cloud re-check PASS.</a:t>
             </a:r>
           </a:p>
           <a:p/>
           <a:p>
             <a:r>
-              <a:t>PLACEHOLDER ONLY. Do not treat as canon dialogue.</a:t>
-            </a:r>
-          </a:p>
-          <a:p/>
-          <a:p>
-            <a:r>
-              <a:t>LAB B HOOK — Release the 200-row demonstrator and assigned random draws. Repeat that it is not bridge evidence.</a:t>
+              <a:t>LAB B — Students work in pairs with assigned random samples of eight from the 200-value spreadsheet, calculate means, and put the means on the board. Repeat that this file is a demonstrator, not Otter Bend evidence.</a:t>
             </a:r>
           </a:p>
         </p:txBody>
@@ -1010,19 +974,13 @@
           <a:lstStyle/>
           <a:p>
             <a:r>
-              <a:t>M09 SAY STATUS: HOLD — CLOUD RE-CHECK PASS REQUIRED.</a:t>
+              <a:t>OLI CANON SAY — revised M09 Cloud re-check PASS.</a:t>
             </a:r>
           </a:p>
           <a:p/>
           <a:p>
             <a:r>
-              <a:t>PLACEHOLDER ONLY. Do not treat as canon dialogue.</a:t>
-            </a:r>
-          </a:p>
-          <a:p/>
-          <a:p>
-            <a:r>
-              <a:t>LAB C HOOK — Return to the actual shoulder-only cores and audit the convenience sampling frame. Diane stays BELIEVER.</a:t>
+              <a:t>LAB C — Students inspect the real Otter Bend core locations. Every core was drilled from the shoulder where access was easy. Diane stays BELIEVER through the hunt; Wes stays drafting and distracted.</a:t>
             </a:r>
           </a:p>
         </p:txBody>
@@ -1092,19 +1050,13 @@
           <a:lstStyle/>
           <a:p>
             <a:r>
-              <a:t>M09 SAY STATUS: HOLD — CLOUD RE-CHECK PASS REQUIRED.</a:t>
+              <a:t>OLI CANON SAY — revised M09 Cloud re-check PASS.</a:t>
             </a:r>
           </a:p>
           <a:p/>
           <a:p>
             <a:r>
-              <a:t>PLACEHOLDER ONLY. Do not treat as canon dialogue.</a:t>
-            </a:r>
-          </a:p>
-          <a:p/>
-          <a:p>
-            <a:r>
-              <a:t>NOTE HOOK — Students commit claim/check/result before reveal; assign no new homework number.</a:t>
+              <a:t>NOTE — Students finalize Note version 2 only: claim, check, result. No new homework number is assigned.</a:t>
             </a:r>
           </a:p>
         </p:txBody>
@@ -1174,19 +1126,13 @@
           <a:lstStyle/>
           <a:p>
             <a:r>
-              <a:t>M09 SAY STATUS: HOLD — CLOUD RE-CHECK PASS REQUIRED.</a:t>
+              <a:t>OLI CANON SAY — revised M09 Cloud re-check PASS.</a:t>
             </a:r>
           </a:p>
           <a:p/>
           <a:p>
             <a:r>
-              <a:t>PLACEHOLDER ONLY. Do not treat as canon dialogue.</a:t>
-            </a:r>
-          </a:p>
-          <a:p/>
-          <a:p>
-            <a:r>
-              <a:t>CLOSE HOOK — Insert only the Cloud re-check PASS close. Do not preview or name the next meeting's statistical methods.</a:t>
+              <a:t>CLOSE — Collect Note version 2. Diane still wants one number. Light hook only: someone will ask whether the deck got worse since the earlier readings. Do not preview or name the next meeting’s statistical method.</a:t>
             </a:r>
           </a:p>
         </p:txBody>
@@ -1256,19 +1202,13 @@
           <a:lstStyle/>
           <a:p>
             <a:r>
-              <a:t>M09 SAY STATUS: HOLD — CLOUD RE-CHECK PASS REQUIRED.</a:t>
+              <a:t>OLI CANON SAY — revised M09 Cloud re-check PASS.</a:t>
             </a:r>
           </a:p>
           <a:p/>
           <a:p>
             <a:r>
-              <a:t>PLACEHOLDER ONLY. Do not treat as canon dialogue.</a:t>
-            </a:r>
-          </a:p>
-          <a:p/>
-          <a:p>
-            <a:r>
-              <a:t>INBOX HOOK — Paste only Cloud re-check PASS dialogue here. Preserve the locked beat: Diane Halvorsen, PE wants one number; FOREMAN reports 41,872,316 cycles; Diane is in BELIEVER mode. Verify the revised Wes Tanaka, EIT line before folding.</a:t>
+              <a:t>INBOX — The simulation clock moves forward from M08. FOREMAN sends an automated Otter Bend sheave-shaft alert: 41,872,316 cycles remaining. Diane Halvorsen, PE stays in BELIEVER mode: “Just give me one number.” Wes Tanaka, EIT flags that the precision implies certainty the fatigue-test scatter does not support.</a:t>
             </a:r>
           </a:p>
         </p:txBody>
@@ -1338,19 +1278,13 @@
           <a:lstStyle/>
           <a:p>
             <a:r>
-              <a:t>M09 SAY STATUS: HOLD — CLOUD RE-CHECK PASS REQUIRED.</a:t>
+              <a:t>OLI CANON SAY — revised M09 Cloud re-check PASS.</a:t>
             </a:r>
           </a:p>
           <a:p/>
           <a:p>
             <a:r>
-              <a:t>PLACEHOLDER ONLY. Do not treat as canon dialogue.</a:t>
-            </a:r>
-          </a:p>
-          <a:p/>
-          <a:p>
-            <a:r>
-              <a:t>HUNT HOOK — Frame trace, compare, sample, and report without revealing the supported reporting form. Diane remains BELIEVER throughout the hunt.</a:t>
+              <a:t>HUNT — The class receives the FOREMAN point estimate, the small fatigue-test dataset, and the 200-value sampling demonstrator. Trace the estimate, inspect scatter, compare random samples of eight, then audit the actual shoulder-only cores.</a:t>
             </a:r>
           </a:p>
         </p:txBody>
@@ -1420,19 +1354,13 @@
           <a:lstStyle/>
           <a:p>
             <a:r>
-              <a:t>M09 SAY STATUS: HOLD — CLOUD RE-CHECK PASS REQUIRED.</a:t>
+              <a:t>OLI CANON SAY — revised M09 Cloud re-check PASS.</a:t>
             </a:r>
           </a:p>
           <a:p/>
           <a:p>
             <a:r>
-              <a:t>PLACEHOLDER ONLY. Do not treat as canon dialogue.</a:t>
-            </a:r>
-          </a:p>
-          <a:p/>
-          <a:p>
-            <a:r>
-              <a:t>TEACH TRANSITION HOOK — Move from the exact-looking output to the statistical basis for a quantitative claim.</a:t>
+              <a:t>TEACH TRANSITION — Lead the approved discussion on the statistical basis for claims. Precision without accuracy or range is misleading.</a:t>
             </a:r>
           </a:p>
         </p:txBody>
@@ -1502,19 +1430,13 @@
           <a:lstStyle/>
           <a:p>
             <a:r>
-              <a:t>M09 SAY STATUS: HOLD — CLOUD RE-CHECK PASS REQUIRED.</a:t>
+              <a:t>OLI CANON SAY — revised M09 Cloud re-check PASS.</a:t>
             </a:r>
           </a:p>
           <a:p/>
           <a:p>
             <a:r>
-              <a:t>PLACEHOLDER ONLY. Do not treat as canon dialogue.</a:t>
-            </a:r>
-          </a:p>
-          <a:p/>
-          <a:p>
-            <a:r>
-              <a:t>TEACH HOOK — Define AI overconfidence through formatting, tone, and omitted uncertainty.</a:t>
+              <a:t>TEACH — FOREMAN’s designed error is overconfidence: one exact-looking point estimate, no uncertainty bounds, and certainty that the noisy inputs cannot support.</a:t>
             </a:r>
           </a:p>
         </p:txBody>
@@ -1584,19 +1506,13 @@
           <a:lstStyle/>
           <a:p>
             <a:r>
-              <a:t>M09 SAY STATUS: HOLD — CLOUD RE-CHECK PASS REQUIRED.</a:t>
+              <a:t>OLI CANON SAY — revised M09 Cloud re-check PASS.</a:t>
             </a:r>
           </a:p>
           <a:p/>
           <a:p>
             <a:r>
-              <a:t>PLACEHOLDER ONLY. Do not treat as canon dialogue.</a:t>
-            </a:r>
-          </a:p>
-          <a:p/>
-          <a:p>
-            <a:r>
-              <a:t>TEACH HOOK — Separate reproducible arithmetic from evidence-supported precision.</a:t>
+              <a:t>TEACH — Reproduce the calculation, then separate correct arithmetic from a defensible reporting scale. The single-cycle display is the error target.</a:t>
             </a:r>
           </a:p>
         </p:txBody>
@@ -1666,19 +1582,13 @@
           <a:lstStyle/>
           <a:p>
             <a:r>
-              <a:t>M09 SAY STATUS: HOLD — CLOUD RE-CHECK PASS REQUIRED.</a:t>
+              <a:t>OLI CANON SAY — revised M09 Cloud re-check PASS.</a:t>
             </a:r>
           </a:p>
           <a:p/>
           <a:p>
             <a:r>
-              <a:t>PLACEHOLDER ONLY. Do not treat as canon dialogue.</a:t>
-            </a:r>
-          </a:p>
-          <a:p/>
-          <a:p>
-            <a:r>
-              <a:t>TEACH HOOK — Treat significant figures as evidence-based reporting, not a decimal-counting ritual.</a:t>
+              <a:t>TEACH — The fatigue evidence supports only two or three significant figures. Significant figures preserve evidence-supported scale; they do not create accuracy.</a:t>
             </a:r>
           </a:p>
         </p:txBody>
@@ -1748,19 +1658,13 @@
           <a:lstStyle/>
           <a:p>
             <a:r>
-              <a:t>M09 SAY STATUS: HOLD — CLOUD RE-CHECK PASS REQUIRED.</a:t>
+              <a:t>OLI CANON SAY — revised M09 Cloud re-check PASS.</a:t>
             </a:r>
           </a:p>
           <a:p/>
           <a:p>
             <a:r>
-              <a:t>PLACEHOLDER ONLY. Do not treat as canon dialogue.</a:t>
-            </a:r>
-          </a:p>
-          <a:p/>
-          <a:p>
-            <a:r>
-              <a:t>TEACH HOOK — Ask for the data, variability, and method behind a quantitative claim.</a:t>
+              <a:t>TEACH — Ask what data, sampling process, variability, and assumptions form the statistical basis for the claim.</a:t>
             </a:r>
           </a:p>
         </p:txBody>
@@ -1830,19 +1734,13 @@
           <a:lstStyle/>
           <a:p>
             <a:r>
-              <a:t>M09 SAY STATUS: HOLD — CLOUD RE-CHECK PASS REQUIRED.</a:t>
+              <a:t>OLI CANON SAY — revised M09 Cloud re-check PASS.</a:t>
             </a:r>
           </a:p>
           <a:p/>
           <a:p>
             <a:r>
-              <a:t>PLACEHOLDER ONLY. Do not treat as canon dialogue.</a:t>
-            </a:r>
-          </a:p>
-          <a:p/>
-          <a:p>
-            <a:r>
-              <a:t>TEACH HOOK — Contrast calculator output with defensible reporting scale without adding character dialogue.</a:t>
+              <a:t>TEACH — SAY: “A single number can be useful only if its limits stay visible.” Diane remains BELIEVER and still wants one number.</a:t>
             </a:r>
           </a:p>
         </p:txBody>
